--- a/MONGODB.pptx
+++ b/MONGODB.pptx
@@ -282,7 +282,7 @@
           <a:p>
             <a:fld id="{06150DCA-7B07-445C-9146-867F378F4311}" type="datetimeFigureOut">
               <a:rPr lang="en-IN" smtClean="0"/>
-              <a:t>06-10-2026</a:t>
+              <a:t>07-10-2026</a:t>
             </a:fld>
             <a:endParaRPr lang="en-IN"/>
           </a:p>
@@ -482,7 +482,7 @@
           <a:p>
             <a:fld id="{06150DCA-7B07-445C-9146-867F378F4311}" type="datetimeFigureOut">
               <a:rPr lang="en-IN" smtClean="0"/>
-              <a:t>06-10-2026</a:t>
+              <a:t>07-10-2026</a:t>
             </a:fld>
             <a:endParaRPr lang="en-IN"/>
           </a:p>
@@ -692,7 +692,7 @@
           <a:p>
             <a:fld id="{06150DCA-7B07-445C-9146-867F378F4311}" type="datetimeFigureOut">
               <a:rPr lang="en-IN" smtClean="0"/>
-              <a:t>06-10-2026</a:t>
+              <a:t>07-10-2026</a:t>
             </a:fld>
             <a:endParaRPr lang="en-IN"/>
           </a:p>
@@ -892,7 +892,7 @@
           <a:p>
             <a:fld id="{06150DCA-7B07-445C-9146-867F378F4311}" type="datetimeFigureOut">
               <a:rPr lang="en-IN" smtClean="0"/>
-              <a:t>06-10-2026</a:t>
+              <a:t>07-10-2026</a:t>
             </a:fld>
             <a:endParaRPr lang="en-IN"/>
           </a:p>
@@ -1168,7 +1168,7 @@
           <a:p>
             <a:fld id="{06150DCA-7B07-445C-9146-867F378F4311}" type="datetimeFigureOut">
               <a:rPr lang="en-IN" smtClean="0"/>
-              <a:t>06-10-2026</a:t>
+              <a:t>07-10-2026</a:t>
             </a:fld>
             <a:endParaRPr lang="en-IN"/>
           </a:p>
@@ -1436,7 +1436,7 @@
           <a:p>
             <a:fld id="{06150DCA-7B07-445C-9146-867F378F4311}" type="datetimeFigureOut">
               <a:rPr lang="en-IN" smtClean="0"/>
-              <a:t>06-10-2026</a:t>
+              <a:t>07-10-2026</a:t>
             </a:fld>
             <a:endParaRPr lang="en-IN"/>
           </a:p>
@@ -1851,7 +1851,7 @@
           <a:p>
             <a:fld id="{06150DCA-7B07-445C-9146-867F378F4311}" type="datetimeFigureOut">
               <a:rPr lang="en-IN" smtClean="0"/>
-              <a:t>06-10-2026</a:t>
+              <a:t>07-10-2026</a:t>
             </a:fld>
             <a:endParaRPr lang="en-IN"/>
           </a:p>
@@ -1993,7 +1993,7 @@
           <a:p>
             <a:fld id="{06150DCA-7B07-445C-9146-867F378F4311}" type="datetimeFigureOut">
               <a:rPr lang="en-IN" smtClean="0"/>
-              <a:t>06-10-2026</a:t>
+              <a:t>07-10-2026</a:t>
             </a:fld>
             <a:endParaRPr lang="en-IN"/>
           </a:p>
@@ -2106,7 +2106,7 @@
           <a:p>
             <a:fld id="{06150DCA-7B07-445C-9146-867F378F4311}" type="datetimeFigureOut">
               <a:rPr lang="en-IN" smtClean="0"/>
-              <a:t>06-10-2026</a:t>
+              <a:t>07-10-2026</a:t>
             </a:fld>
             <a:endParaRPr lang="en-IN"/>
           </a:p>
@@ -2419,7 +2419,7 @@
           <a:p>
             <a:fld id="{06150DCA-7B07-445C-9146-867F378F4311}" type="datetimeFigureOut">
               <a:rPr lang="en-IN" smtClean="0"/>
-              <a:t>06-10-2026</a:t>
+              <a:t>07-10-2026</a:t>
             </a:fld>
             <a:endParaRPr lang="en-IN"/>
           </a:p>
@@ -2708,7 +2708,7 @@
           <a:p>
             <a:fld id="{06150DCA-7B07-445C-9146-867F378F4311}" type="datetimeFigureOut">
               <a:rPr lang="en-IN" smtClean="0"/>
-              <a:t>06-10-2026</a:t>
+              <a:t>07-10-2026</a:t>
             </a:fld>
             <a:endParaRPr lang="en-IN"/>
           </a:p>
@@ -2951,7 +2951,7 @@
           <a:p>
             <a:fld id="{06150DCA-7B07-445C-9146-867F378F4311}" type="datetimeFigureOut">
               <a:rPr lang="en-IN" smtClean="0"/>
-              <a:t>06-10-2026</a:t>
+              <a:t>07-10-2026</a:t>
             </a:fld>
             <a:endParaRPr lang="en-IN"/>
           </a:p>
@@ -5185,7 +5185,7 @@
             <p:ph idx="1"/>
             <p:extLst>
               <p:ext uri="{D42A27DB-BD31-4B8C-83A1-F6EECF244321}">
-                <p14:modId xmlns:p14="http://schemas.microsoft.com/office/powerpoint/2010/main" val="3002836425"/>
+                <p14:modId xmlns:p14="http://schemas.microsoft.com/office/powerpoint/2010/main" val="2221662587"/>
               </p:ext>
             </p:extLst>
           </p:nvPr>
@@ -5261,7 +5261,7 @@
                     <a:bodyPr/>
                     <a:lstStyle/>
                     <a:p>
-                      <a:pPr>
+                      <a:pPr algn="ctr">
                         <a:buNone/>
                       </a:pPr>
                       <a:r>
@@ -5277,7 +5277,7 @@
                     <a:bodyPr/>
                     <a:lstStyle/>
                     <a:p>
-                      <a:pPr>
+                      <a:pPr algn="ctr">
                         <a:buNone/>
                       </a:pPr>
                       <a:r>
@@ -5300,7 +5300,7 @@
                     <a:bodyPr/>
                     <a:lstStyle/>
                     <a:p>
-                      <a:pPr>
+                      <a:pPr algn="ctr">
                         <a:buNone/>
                       </a:pPr>
                       <a:r>
@@ -5316,7 +5316,7 @@
                     <a:bodyPr/>
                     <a:lstStyle/>
                     <a:p>
-                      <a:pPr>
+                      <a:pPr algn="ctr">
                         <a:buNone/>
                       </a:pPr>
                       <a:r>
@@ -5339,7 +5339,7 @@
                     <a:bodyPr/>
                     <a:lstStyle/>
                     <a:p>
-                      <a:pPr>
+                      <a:pPr algn="ctr">
                         <a:buNone/>
                       </a:pPr>
                       <a:r>
@@ -5355,7 +5355,7 @@
                     <a:bodyPr/>
                     <a:lstStyle/>
                     <a:p>
-                      <a:pPr>
+                      <a:pPr algn="ctr">
                         <a:buNone/>
                       </a:pPr>
                       <a:r>
@@ -5378,7 +5378,7 @@
                     <a:bodyPr/>
                     <a:lstStyle/>
                     <a:p>
-                      <a:pPr>
+                      <a:pPr algn="ctr">
                         <a:buNone/>
                       </a:pPr>
                       <a:r>
@@ -5394,7 +5394,7 @@
                     <a:bodyPr/>
                     <a:lstStyle/>
                     <a:p>
-                      <a:pPr>
+                      <a:pPr algn="ctr">
                         <a:buNone/>
                       </a:pPr>
                       <a:r>
@@ -5417,7 +5417,7 @@
                     <a:bodyPr/>
                     <a:lstStyle/>
                     <a:p>
-                      <a:pPr>
+                      <a:pPr algn="ctr">
                         <a:buNone/>
                       </a:pPr>
                       <a:r>
@@ -5433,7 +5433,7 @@
                     <a:bodyPr/>
                     <a:lstStyle/>
                     <a:p>
-                      <a:pPr>
+                      <a:pPr algn="ctr">
                         <a:buNone/>
                       </a:pPr>
                       <a:r>
@@ -5456,7 +5456,7 @@
                     <a:bodyPr/>
                     <a:lstStyle/>
                     <a:p>
-                      <a:pPr>
+                      <a:pPr algn="ctr">
                         <a:buNone/>
                       </a:pPr>
                       <a:r>
@@ -5472,7 +5472,7 @@
                     <a:bodyPr/>
                     <a:lstStyle/>
                     <a:p>
-                      <a:pPr>
+                      <a:pPr algn="ctr">
                         <a:buNone/>
                       </a:pPr>
                       <a:r>
@@ -5962,6 +5962,15 @@
               <a:t> the field.</a:t>
             </a:r>
           </a:p>
+          <a:p>
+            <a:pPr marL="0" indent="0">
+              <a:buNone/>
+            </a:pPr>
+            <a:r>
+              <a:rPr lang="en-IN" dirty="0"/>
+              <a:t>{} Select Whole Document.</a:t>
+            </a:r>
+          </a:p>
         </p:txBody>
       </p:sp>
     </p:spTree>
@@ -6240,12 +6249,16 @@
           <a:lstStyle/>
           <a:p>
             <a:r>
-              <a:rPr lang="en-IN" dirty="0" err="1"/>
-              <a:t>ou</a:t>
-            </a:r>
-            <a:r>
-              <a:rPr lang="en-IN" dirty="0"/>
-              <a:t> can change or create a new database by typing use then the name of the database.</a:t>
+              <a:rPr lang="en-IN" dirty="0"/>
+              <a:t>You can change or create a new database by typing </a:t>
+            </a:r>
+            <a:r>
+              <a:rPr lang="en-IN" b="1" dirty="0"/>
+              <a:t>use </a:t>
+            </a:r>
+            <a:r>
+              <a:rPr lang="en-IN" dirty="0"/>
+              <a:t>then the name of the database.</a:t>
             </a:r>
           </a:p>
           <a:p>
@@ -6800,9 +6813,16 @@
             <p:ph type="title"/>
           </p:nvPr>
         </p:nvSpPr>
-        <p:spPr/>
-        <p:txBody>
-          <a:bodyPr/>
+        <p:spPr>
+          <a:xfrm>
+            <a:off x="838200" y="365125"/>
+            <a:ext cx="10515600" cy="662397"/>
+          </a:xfrm>
+        </p:spPr>
+        <p:txBody>
+          <a:bodyPr>
+            <a:normAutofit fontScale="90000"/>
+          </a:bodyPr>
           <a:lstStyle/>
           <a:p>
             <a:r>
@@ -6828,10 +6848,15 @@
             <p:ph idx="1"/>
           </p:nvPr>
         </p:nvSpPr>
-        <p:spPr/>
+        <p:spPr>
+          <a:xfrm>
+            <a:off x="838200" y="1027522"/>
+            <a:ext cx="10515600" cy="5684363"/>
+          </a:xfrm>
+        </p:spPr>
         <p:txBody>
           <a:bodyPr>
-            <a:normAutofit fontScale="55000" lnSpcReduction="20000"/>
+            <a:noAutofit/>
           </a:bodyPr>
           <a:lstStyle/>
           <a:p>
@@ -6839,11 +6864,11 @@
               <a:buNone/>
             </a:pPr>
             <a:r>
-              <a:rPr lang="en-IN" dirty="0" err="1"/>
+              <a:rPr lang="en-IN" sz="2000" dirty="0" err="1"/>
               <a:t>db.students.insertMany</a:t>
             </a:r>
             <a:r>
-              <a:rPr lang="en-IN" dirty="0"/>
+              <a:rPr lang="en-IN" sz="2000" dirty="0"/>
               <a:t>([</a:t>
             </a:r>
           </a:p>
@@ -6852,7 +6877,7 @@
               <a:buNone/>
             </a:pPr>
             <a:r>
-              <a:rPr lang="en-IN" dirty="0"/>
+              <a:rPr lang="en-IN" sz="2000" dirty="0"/>
               <a:t>    {</a:t>
             </a:r>
           </a:p>
@@ -6861,15 +6886,15 @@
               <a:buNone/>
             </a:pPr>
             <a:r>
-              <a:rPr lang="en-IN" dirty="0"/>
+              <a:rPr lang="en-IN" sz="2000" dirty="0"/>
               <a:t>        </a:t>
             </a:r>
             <a:r>
-              <a:rPr lang="en-IN" dirty="0" err="1"/>
+              <a:rPr lang="en-IN" sz="2000" dirty="0" err="1"/>
               <a:t>rollno</a:t>
             </a:r>
             <a:r>
-              <a:rPr lang="en-IN" dirty="0"/>
+              <a:rPr lang="en-IN" sz="2000" dirty="0"/>
               <a:t>: 101,</a:t>
             </a:r>
           </a:p>
@@ -6878,7 +6903,7 @@
               <a:buNone/>
             </a:pPr>
             <a:r>
-              <a:rPr lang="en-IN" dirty="0"/>
+              <a:rPr lang="en-IN" sz="2000" dirty="0"/>
               <a:t>        name: "Anu",</a:t>
             </a:r>
           </a:p>
@@ -6887,7 +6912,7 @@
               <a:buNone/>
             </a:pPr>
             <a:r>
-              <a:rPr lang="en-IN" dirty="0"/>
+              <a:rPr lang="en-IN" sz="2000" dirty="0"/>
               <a:t>        course: "BCA",</a:t>
             </a:r>
           </a:p>
@@ -6896,7 +6921,7 @@
               <a:buNone/>
             </a:pPr>
             <a:r>
-              <a:rPr lang="en-IN" dirty="0"/>
+              <a:rPr lang="en-IN" sz="2000" dirty="0"/>
               <a:t>        mark: 85</a:t>
             </a:r>
           </a:p>
@@ -6905,7 +6930,7 @@
               <a:buNone/>
             </a:pPr>
             <a:r>
-              <a:rPr lang="en-IN" dirty="0"/>
+              <a:rPr lang="en-IN" sz="2000" dirty="0"/>
               <a:t>    },</a:t>
             </a:r>
           </a:p>
@@ -6914,7 +6939,7 @@
               <a:buNone/>
             </a:pPr>
             <a:r>
-              <a:rPr lang="en-IN" dirty="0"/>
+              <a:rPr lang="en-IN" sz="2000" dirty="0"/>
               <a:t>    {</a:t>
             </a:r>
           </a:p>
@@ -6923,15 +6948,15 @@
               <a:buNone/>
             </a:pPr>
             <a:r>
-              <a:rPr lang="en-IN" dirty="0"/>
+              <a:rPr lang="en-IN" sz="2000" dirty="0"/>
               <a:t>        </a:t>
             </a:r>
             <a:r>
-              <a:rPr lang="en-IN" dirty="0" err="1"/>
+              <a:rPr lang="en-IN" sz="2000" dirty="0" err="1"/>
               <a:t>rollno</a:t>
             </a:r>
             <a:r>
-              <a:rPr lang="en-IN" dirty="0"/>
+              <a:rPr lang="en-IN" sz="2000" dirty="0"/>
               <a:t>: 102,</a:t>
             </a:r>
           </a:p>
@@ -6940,7 +6965,7 @@
               <a:buNone/>
             </a:pPr>
             <a:r>
-              <a:rPr lang="en-IN" dirty="0"/>
+              <a:rPr lang="en-IN" sz="2000" dirty="0"/>
               <a:t>        name: "Rahul",</a:t>
             </a:r>
           </a:p>
@@ -6949,7 +6974,7 @@
               <a:buNone/>
             </a:pPr>
             <a:r>
-              <a:rPr lang="en-IN" dirty="0"/>
+              <a:rPr lang="en-IN" sz="2000" dirty="0"/>
               <a:t>        course: "BCA",</a:t>
             </a:r>
           </a:p>
@@ -6958,7 +6983,7 @@
               <a:buNone/>
             </a:pPr>
             <a:r>
-              <a:rPr lang="en-IN" dirty="0"/>
+              <a:rPr lang="en-IN" sz="2000" dirty="0"/>
               <a:t>        mark: 78</a:t>
             </a:r>
           </a:p>
@@ -6967,7 +6992,7 @@
               <a:buNone/>
             </a:pPr>
             <a:r>
-              <a:rPr lang="en-IN" dirty="0"/>
+              <a:rPr lang="en-IN" sz="2000" dirty="0"/>
               <a:t>    }</a:t>
             </a:r>
           </a:p>
@@ -6976,7 +7001,7 @@
               <a:buNone/>
             </a:pPr>
             <a:r>
-              <a:rPr lang="en-IN" dirty="0"/>
+              <a:rPr lang="en-IN" sz="2000" dirty="0"/>
               <a:t>])</a:t>
             </a:r>
           </a:p>
